--- a/slides/clawops-s6-k8s-event-intelligence.pptx
+++ b/slides/clawops-s6-k8s-event-intelligence.pptx
@@ -14,6 +14,7 @@
     <p:sldId id="259" r:id="rId8"/>
     <p:sldId id="260" r:id="rId9"/>
     <p:sldId id="261" r:id="rId10"/>
+    <p:sldId id="268" r:id="rId17"/>
     <p:sldId id="262" r:id="rId11"/>
     <p:sldId id="263" r:id="rId12"/>
     <p:sldId id="264" r:id="rId13"/>
@@ -8438,6 +8439,847 @@
 </p:sld>
 </file>
 
+<file path=ppt/slides/slide13.xml><?xml version="1.0" encoding="utf-8"?>
+<p:sld xmlns:a="http://schemas.openxmlformats.org/drawingml/2006/main" xmlns:p="http://schemas.openxmlformats.org/presentationml/2006/main" xmlns:r="http://schemas.openxmlformats.org/officeDocument/2006/relationships">
+  <p:cSld>
+    <p:spTree>
+      <p:nvGrpSpPr>
+        <p:cNvPr id="1" name=""/>
+        <p:cNvGrpSpPr/>
+        <p:nvPr/>
+      </p:nvGrpSpPr>
+      <p:grpSpPr/>
+      <p:sp>
+        <p:nvSpPr>
+          <p:cNvPr id="132" name="Google Shape;132;p7"/>
+          <p:cNvSpPr/>
+          <p:nvPr/>
+        </p:nvSpPr>
+        <p:spPr>
+          <a:xfrm>
+            <a:off x="0" y="0"/>
+            <a:ext cx="9144000" cy="5143500"/>
+          </a:xfrm>
+          <a:prstGeom prst="rect">
+            <a:avLst/>
+          </a:prstGeom>
+          <a:solidFill>
+            <a:srgbClr val="080C18"/>
+          </a:solidFill>
+          <a:ln>
+            <a:noFill/>
+          </a:ln>
+        </p:spPr>
+        <p:txBody>
+          <a:bodyPr anchorCtr="0" anchor="ctr" bIns="91425" lIns="91425" spcFirstLastPara="1" rIns="91425" wrap="square" tIns="91425">
+            <a:noAutofit/>
+          </a:bodyPr>
+          <a:lstStyle/>
+          <a:p>
+            <a:pPr indent="0" lvl="0" marL="0" rtl="0" algn="l">
+              <a:spcBef>
+                <a:spcPts val="0"/>
+              </a:spcBef>
+              <a:spcAft>
+                <a:spcPts val="0"/>
+              </a:spcAft>
+              <a:buNone/>
+            </a:pPr>
+            <a:r>
+              <a:t/>
+            </a:r>
+            <a:endParaRPr/>
+          </a:p>
+        </p:txBody>
+      </p:sp>
+      <p:sp>
+        <p:nvSpPr>
+          <p:cNvPr id="133" name="Google Shape;133;p7"/>
+          <p:cNvSpPr/>
+          <p:nvPr/>
+        </p:nvSpPr>
+        <p:spPr>
+          <a:xfrm>
+            <a:off x="457200" y="164592"/>
+            <a:ext cx="8229600" cy="228600"/>
+          </a:xfrm>
+          <a:prstGeom prst="rect">
+            <a:avLst/>
+          </a:prstGeom>
+          <a:noFill/>
+          <a:ln>
+            <a:noFill/>
+          </a:ln>
+        </p:spPr>
+        <p:txBody>
+          <a:bodyPr anchorCtr="0" anchor="ctr" bIns="0" lIns="0" spcFirstLastPara="1" rIns="0" wrap="square" tIns="0">
+            <a:noAutofit/>
+          </a:bodyPr>
+          <a:lstStyle/>
+          <a:p>
+            <a:pPr indent="0" lvl="0" marL="0" marR="0" rtl="0" algn="l">
+              <a:spcBef>
+                <a:spcPts val="0"/>
+              </a:spcBef>
+              <a:spcAft>
+                <a:spcPts val="0"/>
+              </a:spcAft>
+              <a:buClr>
+                <a:srgbClr val="EF9F27"/>
+              </a:buClr>
+              <a:buSzPts val="1000"/>
+              <a:buFont typeface="Consolas"/>
+              <a:buNone/>
+            </a:pPr>
+            <a:r>
+              <a:rPr b="1" i="0" lang="en-US" sz="1000" u="none" cap="none" strike="noStrike">
+                <a:solidFill>
+                  <a:srgbClr val="EF9F27"/>
+                </a:solidFill>
+                <a:latin typeface="Consolas"/>
+                <a:ea typeface="Consolas"/>
+                <a:cs typeface="Consolas"/>
+                <a:sym typeface="Consolas"/>
+              </a:rPr>
+              <a:t>K8S EVENT INTELLIGENCE — CODE ANATOMY</a:t>
+            </a:r>
+            <a:endParaRPr b="0" i="0" sz="1000" u="none" cap="none" strike="noStrike">
+              <a:solidFill>
+                <a:schemeClr val="dk1"/>
+              </a:solidFill>
+              <a:latin typeface="Calibri"/>
+              <a:ea typeface="Calibri"/>
+              <a:cs typeface="Calibri"/>
+              <a:sym typeface="Calibri"/>
+            </a:endParaRPr>
+          </a:p>
+        </p:txBody>
+      </p:sp>
+      <p:sp>
+        <p:nvSpPr>
+          <p:cNvPr id="134" name="Google Shape;134;p7"/>
+          <p:cNvSpPr/>
+          <p:nvPr/>
+        </p:nvSpPr>
+        <p:spPr>
+          <a:xfrm>
+            <a:off x="457200" y="822960"/>
+            <a:ext cx="8229600" cy="640080"/>
+          </a:xfrm>
+          <a:prstGeom prst="rect">
+            <a:avLst/>
+          </a:prstGeom>
+          <a:noFill/>
+          <a:ln>
+            <a:noFill/>
+          </a:ln>
+        </p:spPr>
+        <p:txBody>
+          <a:bodyPr anchorCtr="0" anchor="ctr" bIns="0" lIns="0" spcFirstLastPara="1" rIns="0" wrap="square" tIns="0">
+            <a:noAutofit/>
+          </a:bodyPr>
+          <a:lstStyle/>
+          <a:p>
+            <a:pPr indent="0" lvl="0" marL="0" marR="0" rtl="0" algn="l">
+              <a:spcBef>
+                <a:spcPts val="0"/>
+              </a:spcBef>
+              <a:spcAft>
+                <a:spcPts val="0"/>
+              </a:spcAft>
+              <a:buClr>
+                <a:srgbClr val="FFFFFF"/>
+              </a:buClr>
+              <a:buSzPts val="3600"/>
+              <a:buFont typeface="Calibri"/>
+              <a:buNone/>
+            </a:pPr>
+            <a:r>
+              <a:rPr b="1" i="0" lang="en-US" sz="3600" u="none" cap="none" strike="noStrike">
+                <a:solidFill>
+                  <a:srgbClr val="FFFFFF"/>
+                </a:solidFill>
+                <a:latin typeface="Calibri"/>
+                <a:ea typeface="Calibri"/>
+                <a:cs typeface="Calibri"/>
+                <a:sym typeface="Calibri"/>
+              </a:rPr>
+              <a:t>The Two Code Nodes That Make S6 Smart</a:t>
+            </a:r>
+            <a:endParaRPr b="0" i="0" sz="3600" u="none" cap="none" strike="noStrike">
+              <a:solidFill>
+                <a:schemeClr val="dk1"/>
+              </a:solidFill>
+              <a:latin typeface="Calibri"/>
+              <a:ea typeface="Calibri"/>
+              <a:cs typeface="Calibri"/>
+              <a:sym typeface="Calibri"/>
+            </a:endParaRPr>
+          </a:p>
+        </p:txBody>
+      </p:sp>
+      <p:sp>
+        <p:nvSpPr>
+          <p:cNvPr id="135" name="TextBox 134"/>
+          <p:cNvSpPr txBox="1"/>
+          <p:nvPr/>
+        </p:nvSpPr>
+        <p:spPr>
+          <a:xfrm>
+            <a:off x="457200" y="1463040"/>
+            <a:ext cx="8229600" cy="365760"/>
+          </a:xfrm>
+          <a:prstGeom prst="rect">
+            <a:avLst/>
+          </a:prstGeom>
+          <a:noFill/>
+        </p:spPr>
+        <p:txBody>
+          <a:bodyPr wrap="none">
+            <a:spAutoFit/>
+          </a:bodyPr>
+          <a:lstStyle/>
+          <a:p>
+            <a:r>
+              <a:rPr sz="1100">
+                <a:solidFill>
+                  <a:srgbClr val="8C9AB0"/>
+                </a:solidFill>
+                <a:latin typeface="Consolas"/>
+              </a:rPr>
+              <a:t>Filter + Dedup gates the flow · Already Open? correlates with open incidents</a:t>
+            </a:r>
+          </a:p>
+        </p:txBody>
+      </p:sp>
+      <p:sp>
+        <p:nvSpPr>
+          <p:cNvPr id="136" name="Rounded Rectangle 135"/>
+          <p:cNvSpPr/>
+          <p:nvPr/>
+        </p:nvSpPr>
+        <p:spPr>
+          <a:xfrm>
+            <a:off x="365760" y="1828800"/>
+            <a:ext cx="4160520" cy="2606040"/>
+          </a:xfrm>
+          <a:prstGeom prst="roundRect">
+            <a:avLst/>
+          </a:prstGeom>
+          <a:solidFill>
+            <a:srgbClr val="101B2E"/>
+          </a:solidFill>
+          <a:ln w="12700">
+            <a:solidFill>
+              <a:srgbClr val="213A5E"/>
+            </a:solidFill>
+          </a:ln>
+          <a:effectLst/>
+        </p:spPr>
+        <p:style>
+          <a:lnRef idx="1">
+            <a:schemeClr val="accent1"/>
+          </a:lnRef>
+          <a:fillRef idx="3">
+            <a:schemeClr val="accent1"/>
+          </a:fillRef>
+          <a:effectRef idx="2">
+            <a:schemeClr val="accent1"/>
+          </a:effectRef>
+          <a:fontRef idx="minor">
+            <a:schemeClr val="lt1"/>
+          </a:fontRef>
+        </p:style>
+        <p:txBody>
+          <a:bodyPr rtlCol="0" anchor="ctr"/>
+          <a:lstStyle/>
+          <a:p>
+            <a:pPr algn="ctr"/>
+          </a:p>
+        </p:txBody>
+      </p:sp>
+      <p:sp>
+        <p:nvSpPr>
+          <p:cNvPr id="137" name="TextBox 136"/>
+          <p:cNvSpPr txBox="1"/>
+          <p:nvPr/>
+        </p:nvSpPr>
+        <p:spPr>
+          <a:xfrm>
+            <a:off x="530352" y="1938528"/>
+            <a:ext cx="3831335" cy="2386584"/>
+          </a:xfrm>
+          <a:prstGeom prst="rect">
+            <a:avLst/>
+          </a:prstGeom>
+          <a:noFill/>
+        </p:spPr>
+        <p:txBody>
+          <a:bodyPr wrap="square" anchor="t">
+            <a:spAutoFit/>
+          </a:bodyPr>
+          <a:lstStyle/>
+          <a:p>
+            <a:pPr>
+              <a:spcAft>
+                <a:spcPts val="600"/>
+              </a:spcAft>
+            </a:pPr>
+            <a:r>
+              <a:rPr sz="1200" b="1">
+                <a:solidFill>
+                  <a:srgbClr val="00D4FF"/>
+                </a:solidFill>
+                <a:latin typeface="Consolas"/>
+              </a:rPr>
+              <a:t>① Filter + Dedup  (gates the flow)</a:t>
+            </a:r>
+          </a:p>
+          <a:p>
+            <a:pPr>
+              <a:spcAft>
+                <a:spcPts val="100"/>
+              </a:spcAft>
+            </a:pPr>
+            <a:r>
+              <a:rPr sz="850" b="0">
+                <a:solidFill>
+                  <a:srgbClr val="8C9AB0"/>
+                </a:solidFill>
+                <a:latin typeface="Consolas"/>
+              </a:rPr>
+              <a:t>// only serious severities pass</a:t>
+            </a:r>
+          </a:p>
+          <a:p>
+            <a:pPr>
+              <a:spcAft>
+                <a:spcPts val="100"/>
+              </a:spcAft>
+            </a:pPr>
+            <a:r>
+              <a:rPr sz="850" b="1">
+                <a:solidFill>
+                  <a:srgbClr val="00D4FF"/>
+                </a:solidFill>
+                <a:latin typeface="Consolas"/>
+              </a:rPr>
+              <a:t>if (!['error','warn']</a:t>
+            </a:r>
+          </a:p>
+          <a:p>
+            <a:pPr>
+              <a:spcAft>
+                <a:spcPts val="100"/>
+              </a:spcAft>
+            </a:pPr>
+            <a:r>
+              <a:rPr sz="850" b="1">
+                <a:solidFill>
+                  <a:srgbClr val="00D4FF"/>
+                </a:solidFill>
+                <a:latin typeface="Consolas"/>
+              </a:rPr>
+              <a:t>    .includes(ev.severity)) return [];</a:t>
+            </a:r>
+          </a:p>
+          <a:p>
+            <a:pPr>
+              <a:spcAft>
+                <a:spcPts val="100"/>
+              </a:spcAft>
+            </a:pPr>
+            <a:r>
+              <a:rPr sz="850" b="0">
+                <a:solidFill>
+                  <a:srgbClr val="8C9AB0"/>
+                </a:solidFill>
+                <a:latin typeface="Consolas"/>
+              </a:rPr>
+              <a:t/>
+            </a:r>
+          </a:p>
+          <a:p>
+            <a:pPr>
+              <a:spcAft>
+                <a:spcPts val="100"/>
+              </a:spcAft>
+            </a:pPr>
+            <a:r>
+              <a:rPr sz="850" b="0">
+                <a:solidFill>
+                  <a:srgbClr val="8C9AB0"/>
+                </a:solidFill>
+                <a:latin typeface="Consolas"/>
+              </a:rPr>
+              <a:t>// dedup by DEPLOY, not pod name</a:t>
+            </a:r>
+          </a:p>
+          <a:p>
+            <a:pPr>
+              <a:spcAft>
+                <a:spcPts val="100"/>
+              </a:spcAft>
+            </a:pPr>
+            <a:r>
+              <a:rPr sz="850" b="0">
+                <a:solidFill>
+                  <a:srgbClr val="CBD6E6"/>
+                </a:solidFill>
+                <a:latin typeface="Consolas"/>
+              </a:rPr>
+              <a:t>key = `${reason}:${deploy}:${ns}`;</a:t>
+            </a:r>
+          </a:p>
+          <a:p>
+            <a:pPr>
+              <a:spcAft>
+                <a:spcPts val="100"/>
+              </a:spcAft>
+            </a:pPr>
+            <a:r>
+              <a:rPr sz="850" b="1">
+                <a:solidFill>
+                  <a:srgbClr val="00D4FF"/>
+                </a:solidFill>
+                <a:latin typeface="Consolas"/>
+              </a:rPr>
+              <a:t>if (dedup[key] &amp;&amp; now-dedup[key]</a:t>
+            </a:r>
+          </a:p>
+          <a:p>
+            <a:pPr>
+              <a:spcAft>
+                <a:spcPts val="100"/>
+              </a:spcAft>
+            </a:pPr>
+            <a:r>
+              <a:rPr sz="850" b="1">
+                <a:solidFill>
+                  <a:srgbClr val="00D4FF"/>
+                </a:solidFill>
+                <a:latin typeface="Consolas"/>
+              </a:rPr>
+              <a:t>      &lt; 300000) return [];   </a:t>
+            </a:r>
+          </a:p>
+          <a:p>
+            <a:pPr>
+              <a:spcAft>
+                <a:spcPts val="100"/>
+              </a:spcAft>
+            </a:pPr>
+            <a:r>
+              <a:rPr sz="850" b="0">
+                <a:solidFill>
+                  <a:srgbClr val="8C9AB0"/>
+                </a:solidFill>
+                <a:latin typeface="Consolas"/>
+              </a:rPr>
+              <a:t>// 5min</a:t>
+            </a:r>
+          </a:p>
+          <a:p>
+            <a:pPr>
+              <a:spcAft>
+                <a:spcPts val="100"/>
+              </a:spcAft>
+            </a:pPr>
+            <a:r>
+              <a:rPr sz="850" b="0">
+                <a:solidFill>
+                  <a:srgbClr val="CBD6E6"/>
+                </a:solidFill>
+                <a:latin typeface="Consolas"/>
+              </a:rPr>
+              <a:t>dedup[key] = now;</a:t>
+            </a:r>
+          </a:p>
+          <a:p>
+            <a:pPr>
+              <a:spcAft>
+                <a:spcPts val="100"/>
+              </a:spcAft>
+            </a:pPr>
+            <a:r>
+              <a:rPr sz="850" b="0">
+                <a:solidFill>
+                  <a:srgbClr val="8C9AB0"/>
+                </a:solidFill>
+                <a:latin typeface="Consolas"/>
+              </a:rPr>
+              <a:t/>
+            </a:r>
+          </a:p>
+          <a:p>
+            <a:pPr>
+              <a:spcAft>
+                <a:spcPts val="100"/>
+              </a:spcAft>
+            </a:pPr>
+            <a:r>
+              <a:rPr sz="850" b="0">
+                <a:solidFill>
+                  <a:srgbClr val="FFC44D"/>
+                </a:solidFill>
+                <a:latin typeface="Consolas"/>
+              </a:rPr>
+              <a:t>⚡ pod names change on restart —</a:t>
+            </a:r>
+          </a:p>
+          <a:p>
+            <a:pPr>
+              <a:spcAft>
+                <a:spcPts val="100"/>
+              </a:spcAft>
+            </a:pPr>
+            <a:r>
+              <a:rPr sz="850" b="0">
+                <a:solidFill>
+                  <a:srgbClr val="FFC44D"/>
+                </a:solidFill>
+                <a:latin typeface="Consolas"/>
+              </a:rPr>
+              <a:t>   so we key on the deployment</a:t>
+            </a:r>
+          </a:p>
+        </p:txBody>
+      </p:sp>
+      <p:sp>
+        <p:nvSpPr>
+          <p:cNvPr id="138" name="Rounded Rectangle 137"/>
+          <p:cNvSpPr/>
+          <p:nvPr/>
+        </p:nvSpPr>
+        <p:spPr>
+          <a:xfrm>
+            <a:off x="4617720" y="1828800"/>
+            <a:ext cx="4160520" cy="2606040"/>
+          </a:xfrm>
+          <a:prstGeom prst="roundRect">
+            <a:avLst/>
+          </a:prstGeom>
+          <a:solidFill>
+            <a:srgbClr val="101B2E"/>
+          </a:solidFill>
+          <a:ln w="12700">
+            <a:solidFill>
+              <a:srgbClr val="213A5E"/>
+            </a:solidFill>
+          </a:ln>
+          <a:effectLst/>
+        </p:spPr>
+        <p:style>
+          <a:lnRef idx="1">
+            <a:schemeClr val="accent1"/>
+          </a:lnRef>
+          <a:fillRef idx="3">
+            <a:schemeClr val="accent1"/>
+          </a:fillRef>
+          <a:effectRef idx="2">
+            <a:schemeClr val="accent1"/>
+          </a:effectRef>
+          <a:fontRef idx="minor">
+            <a:schemeClr val="lt1"/>
+          </a:fontRef>
+        </p:style>
+        <p:txBody>
+          <a:bodyPr rtlCol="0" anchor="ctr"/>
+          <a:lstStyle/>
+          <a:p>
+            <a:pPr algn="ctr"/>
+          </a:p>
+        </p:txBody>
+      </p:sp>
+      <p:sp>
+        <p:nvSpPr>
+          <p:cNvPr id="139" name="TextBox 138"/>
+          <p:cNvSpPr txBox="1"/>
+          <p:nvPr/>
+        </p:nvSpPr>
+        <p:spPr>
+          <a:xfrm>
+            <a:off x="4782312" y="1938528"/>
+            <a:ext cx="3831335" cy="2386584"/>
+          </a:xfrm>
+          <a:prstGeom prst="rect">
+            <a:avLst/>
+          </a:prstGeom>
+          <a:noFill/>
+        </p:spPr>
+        <p:txBody>
+          <a:bodyPr wrap="square" anchor="t">
+            <a:spAutoFit/>
+          </a:bodyPr>
+          <a:lstStyle/>
+          <a:p>
+            <a:pPr>
+              <a:spcAft>
+                <a:spcPts val="600"/>
+              </a:spcAft>
+            </a:pPr>
+            <a:r>
+              <a:rPr sz="1200" b="1">
+                <a:solidFill>
+                  <a:srgbClr val="FFC44D"/>
+                </a:solidFill>
+                <a:latin typeface="Consolas"/>
+              </a:rPr>
+              <a:t>② Already Open?  (correlate)</a:t>
+            </a:r>
+          </a:p>
+          <a:p>
+            <a:pPr>
+              <a:spcAft>
+                <a:spcPts val="100"/>
+              </a:spcAft>
+            </a:pPr>
+            <a:r>
+              <a:rPr sz="850" b="0">
+                <a:solidFill>
+                  <a:srgbClr val="8C9AB0"/>
+                </a:solidFill>
+                <a:latin typeface="Consolas"/>
+              </a:rPr>
+              <a:t>// GET /incidents?limit=20 from MCP</a:t>
+            </a:r>
+          </a:p>
+          <a:p>
+            <a:pPr>
+              <a:spcAft>
+                <a:spcPts val="100"/>
+              </a:spcAft>
+            </a:pPr>
+            <a:r>
+              <a:rPr sz="850" b="0">
+                <a:solidFill>
+                  <a:srgbClr val="CBD6E6"/>
+                </a:solidFill>
+                <a:latin typeface="Consolas"/>
+              </a:rPr>
+              <a:t>open = list.find(i =&gt;</a:t>
+            </a:r>
+          </a:p>
+          <a:p>
+            <a:pPr>
+              <a:spcAft>
+                <a:spcPts val="100"/>
+              </a:spcAft>
+            </a:pPr>
+            <a:r>
+              <a:rPr sz="850" b="1">
+                <a:solidFill>
+                  <a:srgbClr val="00D4FF"/>
+                </a:solidFill>
+                <a:latin typeface="Consolas"/>
+              </a:rPr>
+              <a:t>  i.status === 'pending' &amp;&amp;</a:t>
+            </a:r>
+          </a:p>
+          <a:p>
+            <a:pPr>
+              <a:spcAft>
+                <a:spcPts val="100"/>
+              </a:spcAft>
+            </a:pPr>
+            <a:r>
+              <a:rPr sz="850" b="0">
+                <a:solidFill>
+                  <a:srgbClr val="CBD6E6"/>
+                </a:solidFill>
+                <a:latin typeface="Consolas"/>
+              </a:rPr>
+              <a:t>  fresh(i.created_at, 2h) &amp;&amp;</a:t>
+            </a:r>
+          </a:p>
+          <a:p>
+            <a:pPr>
+              <a:spcAft>
+                <a:spcPts val="100"/>
+              </a:spcAft>
+            </a:pPr>
+            <a:r>
+              <a:rPr sz="850" b="0">
+                <a:solidFill>
+                  <a:srgbClr val="CBD6E6"/>
+                </a:solidFill>
+                <a:latin typeface="Consolas"/>
+              </a:rPr>
+              <a:t>  matchesDeploy(i, ev.deploy));</a:t>
+            </a:r>
+          </a:p>
+          <a:p>
+            <a:pPr>
+              <a:spcAft>
+                <a:spcPts val="100"/>
+              </a:spcAft>
+            </a:pPr>
+            <a:r>
+              <a:rPr sz="850" b="0">
+                <a:solidFill>
+                  <a:srgbClr val="8C9AB0"/>
+                </a:solidFill>
+                <a:latin typeface="Consolas"/>
+              </a:rPr>
+              <a:t/>
+            </a:r>
+          </a:p>
+          <a:p>
+            <a:pPr>
+              <a:spcAft>
+                <a:spcPts val="100"/>
+              </a:spcAft>
+            </a:pPr>
+            <a:r>
+              <a:rPr sz="850" b="1">
+                <a:solidFill>
+                  <a:srgbClr val="00D4FF"/>
+                </a:solidFill>
+                <a:latin typeface="Consolas"/>
+              </a:rPr>
+              <a:t>if (open) → Route on Open? = YES</a:t>
+            </a:r>
+          </a:p>
+          <a:p>
+            <a:pPr>
+              <a:spcAft>
+                <a:spcPts val="100"/>
+              </a:spcAft>
+            </a:pPr>
+            <a:r>
+              <a:rPr sz="850" b="0">
+                <a:solidFill>
+                  <a:srgbClr val="CBD6E6"/>
+                </a:solidFill>
+                <a:latin typeface="Consolas"/>
+              </a:rPr>
+              <a:t>   → Send Ongoing Notice (#key)</a:t>
+            </a:r>
+          </a:p>
+          <a:p>
+            <a:pPr>
+              <a:spcAft>
+                <a:spcPts val="100"/>
+              </a:spcAft>
+            </a:pPr>
+            <a:r>
+              <a:rPr sz="850" b="0">
+                <a:solidFill>
+                  <a:srgbClr val="CBD6E6"/>
+                </a:solidFill>
+                <a:latin typeface="Consolas"/>
+              </a:rPr>
+              <a:t>   → STOP. no AI, no new incident</a:t>
+            </a:r>
+          </a:p>
+          <a:p>
+            <a:pPr>
+              <a:spcAft>
+                <a:spcPts val="100"/>
+              </a:spcAft>
+            </a:pPr>
+            <a:r>
+              <a:rPr sz="850" b="0">
+                <a:solidFill>
+                  <a:srgbClr val="8C9AB0"/>
+                </a:solidFill>
+                <a:latin typeface="Consolas"/>
+              </a:rPr>
+              <a:t>else → K8s Event Agent investigates</a:t>
+            </a:r>
+          </a:p>
+          <a:p>
+            <a:pPr>
+              <a:spcAft>
+                <a:spcPts val="100"/>
+              </a:spcAft>
+            </a:pPr>
+            <a:r>
+              <a:rPr sz="850" b="0">
+                <a:solidFill>
+                  <a:srgbClr val="8C9AB0"/>
+                </a:solidFill>
+                <a:latin typeface="Consolas"/>
+              </a:rPr>
+              <a:t/>
+            </a:r>
+          </a:p>
+          <a:p>
+            <a:pPr>
+              <a:spcAft>
+                <a:spcPts val="100"/>
+              </a:spcAft>
+            </a:pPr>
+            <a:r>
+              <a:rPr sz="850" b="0">
+                <a:solidFill>
+                  <a:srgbClr val="FFC44D"/>
+                </a:solidFill>
+                <a:latin typeface="Consolas"/>
+              </a:rPr>
+              <a:t>⚡ matches S5 OR S6 incidents — one</a:t>
+            </a:r>
+          </a:p>
+          <a:p>
+            <a:pPr>
+              <a:spcAft>
+                <a:spcPts val="100"/>
+              </a:spcAft>
+            </a:pPr>
+            <a:r>
+              <a:rPr sz="850" b="0">
+                <a:solidFill>
+                  <a:srgbClr val="FFC44D"/>
+                </a:solidFill>
+                <a:latin typeface="Consolas"/>
+              </a:rPr>
+              <a:t>   key per deployment, no duplicates</a:t>
+            </a:r>
+          </a:p>
+        </p:txBody>
+      </p:sp>
+      <p:sp>
+        <p:nvSpPr>
+          <p:cNvPr id="140" name="TextBox 139"/>
+          <p:cNvSpPr txBox="1"/>
+          <p:nvPr/>
+        </p:nvSpPr>
+        <p:spPr>
+          <a:xfrm>
+            <a:off x="365760" y="4626864"/>
+            <a:ext cx="8412480" cy="365760"/>
+          </a:xfrm>
+          <a:prstGeom prst="rect">
+            <a:avLst/>
+          </a:prstGeom>
+          <a:noFill/>
+        </p:spPr>
+        <p:txBody>
+          <a:bodyPr wrap="none">
+            <a:spAutoFit/>
+          </a:bodyPr>
+          <a:lstStyle/>
+          <a:p>
+            <a:r>
+              <a:rPr sz="1050" b="1">
+                <a:solidFill>
+                  <a:srgbClr val="35E09A"/>
+                </a:solidFill>
+                <a:latin typeface="Consolas"/>
+              </a:rPr>
+              <a:t>Code nodes only shape data — they decide WHETHER to invoke the AI. The agent runs kubectl/promql itself.</a:t>
+            </a:r>
+          </a:p>
+        </p:txBody>
+      </p:sp>
+    </p:spTree>
+  </p:cSld>
+  <p:clrMapOvr>
+    <a:masterClrMapping/>
+  </p:clrMapOvr>
+</p:sld>
+</file>
+
 <file path=ppt/slides/slide2.xml><?xml version="1.0" encoding="utf-8"?>
 <p:sld xmlns:a="http://schemas.openxmlformats.org/drawingml/2006/main" xmlns:r="http://schemas.openxmlformats.org/officeDocument/2006/relationships" xmlns:mc="http://schemas.openxmlformats.org/markup-compatibility/2006" xmlns:mv="urn:schemas-microsoft-com:mac:vml" xmlns:p="http://schemas.openxmlformats.org/presentationml/2006/main" xmlns:c="http://schemas.openxmlformats.org/drawingml/2006/chart" xmlns:dgm="http://schemas.openxmlformats.org/drawingml/2006/diagram" xmlns:o="urn:schemas-microsoft-com:office:office" xmlns:v="urn:schemas-microsoft-com:vml" xmlns:pvml="urn:schemas-microsoft-com:office:powerpoint" xmlns:com="http://schemas.openxmlformats.org/drawingml/2006/compatibility" xmlns:p14="http://schemas.microsoft.com/office/powerpoint/2010/main" xmlns:p15="http://schemas.microsoft.com/office/powerpoint/2012/main" xmlns:ahyp="http://schemas.microsoft.com/office/drawing/2018/hyperlinkcolor">
   <p:cSld>
@@ -17175,7 +18017,7 @@
                 <a:cs typeface="Calibri"/>
                 <a:sym typeface="Calibri"/>
               </a:rPr>
-              <a:t>Save incident key</a:t>
+              <a:t>Action? → store key + /approve</a:t>
             </a:r>
             <a:endParaRPr b="0" i="0" sz="1000" u="none" cap="none" strike="noStrike">
               <a:solidFill>
@@ -17212,7 +18054,7 @@
                 <a:cs typeface="Calibri"/>
                 <a:sym typeface="Calibri"/>
               </a:rPr>
-              <a:t>Post to chat</a:t>
+              <a:t>Else → info-only chat</a:t>
             </a:r>
             <a:endParaRPr b="0" i="0" sz="1000" u="none" cap="none" strike="noStrike">
               <a:solidFill>
@@ -18314,7 +19156,7 @@
                 <a:cs typeface="Consolas"/>
                 <a:sym typeface="Consolas"/>
               </a:rPr>
-              <a:t>kubectl_write</a:t>
+              <a:t>SRE_ACTION:  → handoff</a:t>
             </a:r>
             <a:endParaRPr b="0" i="0" sz="1200" u="none" cap="none" strike="noStrike">
               <a:solidFill>
@@ -18377,7 +19219,7 @@
                 <a:cs typeface="Calibri"/>
                 <a:sym typeface="Calibri"/>
               </a:rPr>
-              <a:t>exec, delete, rollout — gated</a:t>
+              <a:t>agent recommends, S4 executes on /approve</a:t>
             </a:r>
             <a:endParaRPr b="0" i="0" sz="1000" u="none" cap="none" strike="noStrike">
               <a:solidFill>
